--- a/Appendix/2026年-精彩的一堂课项目_2026_Apr_27-vFinal/2026年-精彩一堂课.pptx
+++ b/Appendix/2026年-精彩的一堂课项目_2026_Apr_27-vFinal/2026年-精彩一堂课.pptx
@@ -5039,7 +5039,7 @@
         <p:spPr>
           <a:xfrm>
             <a:off x="1985166" y="77741"/>
-            <a:ext cx="4966116" cy="646331"/>
+            <a:ext cx="5497182" cy="646331"/>
           </a:xfrm>
           <a:prstGeom prst="rect">
             <a:avLst/>
@@ -5059,7 +5059,7 @@
             <a:r>
               <a:rPr lang="zh-CN" altLang="en-US" sz="1800" b="1" dirty="0">
                 <a:solidFill>
-                  <a:srgbClr val="FF0000"/>
+                  <a:schemeClr val="accent1"/>
                 </a:solidFill>
                 <a:latin typeface="楷体" panose="02010609060101010101" pitchFamily="49" charset="-122"/>
                 <a:ea typeface="楷体" panose="02010609060101010101" pitchFamily="49" charset="-122"/>
@@ -5073,7 +5073,7 @@
                 <a:ea typeface="楷体" panose="02010609060101010101" pitchFamily="49" charset="-122"/>
                 <a:cs typeface="楷体" panose="02010609060101010101" pitchFamily="49" charset="-122"/>
               </a:rPr>
-              <a:t>（爱丽丝</a:t>
+              <a:t>（包括爱丽丝</a:t>
             </a:r>
             <a:r>
               <a:rPr lang="zh-CN" altLang="en-US" b="1" dirty="0">
@@ -5105,18 +5105,18 @@
                 <a:ea typeface="楷体" panose="02010609060101010101" pitchFamily="49" charset="-122"/>
                 <a:cs typeface="楷体" panose="02010609060101010101" pitchFamily="49" charset="-122"/>
               </a:rPr>
-              <a:t>）都会</a:t>
+              <a:t>）</a:t>
             </a:r>
             <a:r>
               <a:rPr lang="zh-CN" altLang="en-US" sz="1800" b="1" dirty="0">
                 <a:solidFill>
-                  <a:srgbClr val="FF0000"/>
+                  <a:schemeClr val="accent1"/>
                 </a:solidFill>
                 <a:latin typeface="楷体" panose="02010609060101010101" pitchFamily="49" charset="-122"/>
                 <a:ea typeface="楷体" panose="02010609060101010101" pitchFamily="49" charset="-122"/>
                 <a:cs typeface="楷体" panose="02010609060101010101" pitchFamily="49" charset="-122"/>
               </a:rPr>
-              <a:t>广播到区块链网络</a:t>
+              <a:t>都会广播到区块链网络</a:t>
             </a:r>
           </a:p>
         </p:txBody>
